--- a/project/ready/SB_맛식당.pptx
+++ b/project/ready/SB_맛식당.pptx
@@ -274,7 +274,7 @@
           <a:p>
             <a:fld id="{C51E1BFF-CB3E-490C-97E3-FD4B0CE1268E}" type="datetimeFigureOut">
               <a:rPr lang="ko-KR" altLang="en-US" smtClean="0"/>
-              <a:t>2026-06-17</a:t>
+              <a:t>2026-06-19</a:t>
             </a:fld>
             <a:endParaRPr lang="ko-KR" altLang="en-US"/>
           </a:p>
@@ -472,7 +472,7 @@
           <a:p>
             <a:fld id="{C51E1BFF-CB3E-490C-97E3-FD4B0CE1268E}" type="datetimeFigureOut">
               <a:rPr lang="ko-KR" altLang="en-US" smtClean="0"/>
-              <a:t>2026-06-17</a:t>
+              <a:t>2026-06-19</a:t>
             </a:fld>
             <a:endParaRPr lang="ko-KR" altLang="en-US"/>
           </a:p>
@@ -680,7 +680,7 @@
           <a:p>
             <a:fld id="{C51E1BFF-CB3E-490C-97E3-FD4B0CE1268E}" type="datetimeFigureOut">
               <a:rPr lang="ko-KR" altLang="en-US" smtClean="0"/>
-              <a:t>2026-06-17</a:t>
+              <a:t>2026-06-19</a:t>
             </a:fld>
             <a:endParaRPr lang="ko-KR" altLang="en-US"/>
           </a:p>
@@ -878,7 +878,7 @@
           <a:p>
             <a:fld id="{C51E1BFF-CB3E-490C-97E3-FD4B0CE1268E}" type="datetimeFigureOut">
               <a:rPr lang="ko-KR" altLang="en-US" smtClean="0"/>
-              <a:t>2026-06-17</a:t>
+              <a:t>2026-06-19</a:t>
             </a:fld>
             <a:endParaRPr lang="ko-KR" altLang="en-US"/>
           </a:p>
@@ -1153,7 +1153,7 @@
           <a:p>
             <a:fld id="{C51E1BFF-CB3E-490C-97E3-FD4B0CE1268E}" type="datetimeFigureOut">
               <a:rPr lang="ko-KR" altLang="en-US" smtClean="0"/>
-              <a:t>2026-06-17</a:t>
+              <a:t>2026-06-19</a:t>
             </a:fld>
             <a:endParaRPr lang="ko-KR" altLang="en-US"/>
           </a:p>
@@ -1418,7 +1418,7 @@
           <a:p>
             <a:fld id="{C51E1BFF-CB3E-490C-97E3-FD4B0CE1268E}" type="datetimeFigureOut">
               <a:rPr lang="ko-KR" altLang="en-US" smtClean="0"/>
-              <a:t>2026-06-17</a:t>
+              <a:t>2026-06-19</a:t>
             </a:fld>
             <a:endParaRPr lang="ko-KR" altLang="en-US"/>
           </a:p>
@@ -1830,7 +1830,7 @@
           <a:p>
             <a:fld id="{C51E1BFF-CB3E-490C-97E3-FD4B0CE1268E}" type="datetimeFigureOut">
               <a:rPr lang="ko-KR" altLang="en-US" smtClean="0"/>
-              <a:t>2026-06-17</a:t>
+              <a:t>2026-06-19</a:t>
             </a:fld>
             <a:endParaRPr lang="ko-KR" altLang="en-US"/>
           </a:p>
@@ -1971,7 +1971,7 @@
           <a:p>
             <a:fld id="{C51E1BFF-CB3E-490C-97E3-FD4B0CE1268E}" type="datetimeFigureOut">
               <a:rPr lang="ko-KR" altLang="en-US" smtClean="0"/>
-              <a:t>2026-06-17</a:t>
+              <a:t>2026-06-19</a:t>
             </a:fld>
             <a:endParaRPr lang="ko-KR" altLang="en-US"/>
           </a:p>
@@ -2084,7 +2084,7 @@
           <a:p>
             <a:fld id="{C51E1BFF-CB3E-490C-97E3-FD4B0CE1268E}" type="datetimeFigureOut">
               <a:rPr lang="ko-KR" altLang="en-US" smtClean="0"/>
-              <a:t>2026-06-17</a:t>
+              <a:t>2026-06-19</a:t>
             </a:fld>
             <a:endParaRPr lang="ko-KR" altLang="en-US"/>
           </a:p>
@@ -2395,7 +2395,7 @@
           <a:p>
             <a:fld id="{C51E1BFF-CB3E-490C-97E3-FD4B0CE1268E}" type="datetimeFigureOut">
               <a:rPr lang="ko-KR" altLang="en-US" smtClean="0"/>
-              <a:t>2026-06-17</a:t>
+              <a:t>2026-06-19</a:t>
             </a:fld>
             <a:endParaRPr lang="ko-KR" altLang="en-US"/>
           </a:p>
@@ -2683,7 +2683,7 @@
           <a:p>
             <a:fld id="{C51E1BFF-CB3E-490C-97E3-FD4B0CE1268E}" type="datetimeFigureOut">
               <a:rPr lang="ko-KR" altLang="en-US" smtClean="0"/>
-              <a:t>2026-06-17</a:t>
+              <a:t>2026-06-19</a:t>
             </a:fld>
             <a:endParaRPr lang="ko-KR" altLang="en-US"/>
           </a:p>
@@ -2924,7 +2924,7 @@
           <a:p>
             <a:fld id="{C51E1BFF-CB3E-490C-97E3-FD4B0CE1268E}" type="datetimeFigureOut">
               <a:rPr lang="ko-KR" altLang="en-US" smtClean="0"/>
-              <a:t>2026-06-17</a:t>
+              <a:t>2026-06-19</a:t>
             </a:fld>
             <a:endParaRPr lang="ko-KR" altLang="en-US"/>
           </a:p>
@@ -5169,7 +5169,7 @@
         <p:spPr>
           <a:xfrm>
             <a:off x="157018" y="127123"/>
-            <a:ext cx="1620315" cy="369332"/>
+            <a:ext cx="1118576" cy="369332"/>
           </a:xfrm>
           <a:prstGeom prst="rect">
             <a:avLst/>
@@ -5234,21 +5234,14 @@
               <a:t> </a:t>
             </a:r>
             <a:r>
-              <a:rPr kumimoji="0" lang="en-US" altLang="ko-KR" sz="1800" b="0" i="0" u="none" strike="noStrike" kern="1200" cap="none" spc="0" normalizeH="0" baseline="0" noProof="0" dirty="0">
-                <a:ln>
-                  <a:noFill/>
-                </a:ln>
+              <a:rPr lang="en-US" altLang="ko-KR" dirty="0">
                 <a:solidFill>
                   <a:prstClr val="black"/>
                 </a:solidFill>
-                <a:effectLst/>
-                <a:uLnTx/>
-                <a:uFillTx/>
                 <a:latin typeface="한컴 말랑말랑 Bold" panose="020F0803000000000000" pitchFamily="50" charset="-127"/>
                 <a:ea typeface="한컴 말랑말랑 Bold" panose="020F0803000000000000" pitchFamily="50" charset="-127"/>
-                <a:cs typeface="+mn-cs"/>
-              </a:rPr>
-              <a:t>upload</a:t>
+              </a:rPr>
+              <a:t>fix</a:t>
             </a:r>
             <a:endParaRPr kumimoji="0" lang="ko-KR" altLang="en-US" sz="1800" b="0" i="0" u="none" strike="noStrike" kern="1200" cap="none" spc="0" normalizeH="0" baseline="0" noProof="0" dirty="0">
               <a:ln>
